--- a/benchmark/corpus/fi/strategia_2026_2030.pptx
+++ b/benchmark/corpus/fi/strategia_2026_2030.pptx
@@ -3132,7 +3132,7 @@
           <a:p>
             <a:r>
               <a:rPr sz="2000"/>
-              <a:t>Hallituksen esitys, 2.12.2025</a:t>
+              <a:t>Esitys hallitukselle, 2.12.2025</a:t>
             </a:r>
           </a:p>
         </p:txBody>
@@ -3408,7 +3408,7 @@
           <a:lstStyle/>
           <a:p>
             <a:r>
-              <a:t>Polttamisesta luopuminen</a:t>
+              <a:t>Polttoon perustuvasta tuotannosta luopuminen</a:t>
             </a:r>
           </a:p>
         </p:txBody>
@@ -3509,7 +3509,7 @@
           <a:p>
             <a:r>
               <a:rPr sz="2000"/>
-              <a:t>Toimitusketjujen viivästykset, erityisesti muuntajat</a:t>
+              <a:t>Toimitusketjujen viivästykset, erityisesti muuntajien</a:t>
             </a:r>
           </a:p>
           <a:p>
